--- a/ppt/BigData12-Project.pptx
+++ b/ppt/BigData12-Project.pptx
@@ -5,10 +5,10 @@
     <p:sldMasterId id="2147483653" r:id="rId1"/>
   </p:sldMasterIdLst>
   <p:notesMasterIdLst>
-    <p:notesMasterId r:id="rId25"/>
+    <p:notesMasterId r:id="rId18"/>
   </p:notesMasterIdLst>
   <p:handoutMasterIdLst>
-    <p:handoutMasterId r:id="rId26"/>
+    <p:handoutMasterId r:id="rId19"/>
   </p:handoutMasterIdLst>
   <p:sldIdLst>
     <p:sldId id="264" r:id="rId2"/>
@@ -27,13 +27,6 @@
     <p:sldId id="348" r:id="rId15"/>
     <p:sldId id="349" r:id="rId16"/>
     <p:sldId id="350" r:id="rId17"/>
-    <p:sldId id="333" r:id="rId18"/>
-    <p:sldId id="322" r:id="rId19"/>
-    <p:sldId id="340" r:id="rId20"/>
-    <p:sldId id="341" r:id="rId21"/>
-    <p:sldId id="351" r:id="rId22"/>
-    <p:sldId id="352" r:id="rId23"/>
-    <p:sldId id="354" r:id="rId24"/>
   </p:sldIdLst>
   <p:sldSz cx="9144000" cy="6858000" type="screen4x3"/>
   <p:notesSz cx="6648450" cy="9782175"/>
@@ -1180,7 +1173,7 @@
           <a:p>
             <a:fld id="{A0ABDEA8-EB22-42D4-B8E2-0C26FFC92FC1}" type="datetimeFigureOut">
               <a:rPr lang="fr-FR" smtClean="0"/>
-              <a:t>14/07/2025</a:t>
+              <a:t>22/07/2025</a:t>
             </a:fld>
             <a:endParaRPr lang="fr-FR"/>
           </a:p>
@@ -6899,725 +6892,6 @@
 </p:sld>
 </file>
 
-<file path=ppt/slides/slide17.xml><?xml version="1.0" encoding="utf-8"?>
-<p:sld xmlns:a="http://schemas.openxmlformats.org/drawingml/2006/main" xmlns:r="http://schemas.openxmlformats.org/officeDocument/2006/relationships" xmlns:p="http://schemas.openxmlformats.org/presentationml/2006/main">
-  <p:cSld>
-    <p:spTree>
-      <p:nvGrpSpPr>
-        <p:cNvPr id="1" name=""/>
-        <p:cNvGrpSpPr/>
-        <p:nvPr/>
-      </p:nvGrpSpPr>
-      <p:grpSpPr>
-        <a:xfrm>
-          <a:off x="0" y="0"/>
-          <a:ext cx="0" cy="0"/>
-          <a:chOff x="0" y="0"/>
-          <a:chExt cx="0" cy="0"/>
-        </a:xfrm>
-      </p:grpSpPr>
-      <p:sp>
-        <p:nvSpPr>
-          <p:cNvPr id="2" name="Titre 1">
-            <a:extLst>
-              <a:ext uri="{FF2B5EF4-FFF2-40B4-BE49-F238E27FC236}">
-                <a16:creationId xmlns:a16="http://schemas.microsoft.com/office/drawing/2014/main" id="{553CA38B-3BB0-4629-BF22-7D4D4C6D2943}"/>
-              </a:ext>
-            </a:extLst>
-          </p:cNvPr>
-          <p:cNvSpPr>
-            <a:spLocks noGrp="1"/>
-          </p:cNvSpPr>
-          <p:nvPr>
-            <p:ph type="title"/>
-          </p:nvPr>
-        </p:nvSpPr>
-        <p:spPr/>
-        <p:txBody>
-          <a:bodyPr/>
-          <a:lstStyle/>
-          <a:p>
-            <a:r>
-              <a:rPr lang="fr-FR" dirty="0"/>
-              <a:t>Les enjeux 1/3</a:t>
-            </a:r>
-          </a:p>
-        </p:txBody>
-      </p:sp>
-      <p:sp>
-        <p:nvSpPr>
-          <p:cNvPr id="7" name="Espace réservé du contenu 2">
-            <a:extLst>
-              <a:ext uri="{FF2B5EF4-FFF2-40B4-BE49-F238E27FC236}">
-                <a16:creationId xmlns:a16="http://schemas.microsoft.com/office/drawing/2014/main" id="{62CAC85E-A812-47F9-A7C5-91F75568AA15}"/>
-              </a:ext>
-            </a:extLst>
-          </p:cNvPr>
-          <p:cNvSpPr txBox="1">
-            <a:spLocks/>
-          </p:cNvSpPr>
-          <p:nvPr/>
-        </p:nvSpPr>
-        <p:spPr>
-          <a:xfrm>
-            <a:off x="628650" y="2226469"/>
-            <a:ext cx="7886700" cy="3263504"/>
-          </a:xfrm>
-          <a:prstGeom prst="rect">
-            <a:avLst/>
-          </a:prstGeom>
-        </p:spPr>
-        <p:txBody>
-          <a:bodyPr/>
-          <a:lstStyle>
-            <a:lvl1pPr marL="228600" indent="-228600" algn="l" defTabSz="914400" rtl="0" eaLnBrk="1" latinLnBrk="0" hangingPunct="1">
-              <a:lnSpc>
-                <a:spcPct val="90000"/>
-              </a:lnSpc>
-              <a:spcBef>
-                <a:spcPts val="1000"/>
-              </a:spcBef>
-              <a:buFont typeface="Arial" panose="020B0604020202020204" pitchFamily="34" charset="0"/>
-              <a:buChar char="•"/>
-              <a:defRPr sz="2800" kern="1200">
-                <a:solidFill>
-                  <a:schemeClr val="tx1"/>
-                </a:solidFill>
-                <a:latin typeface="+mn-lt"/>
-                <a:ea typeface="+mn-ea"/>
-                <a:cs typeface="+mn-cs"/>
-              </a:defRPr>
-            </a:lvl1pPr>
-            <a:lvl2pPr marL="685800" indent="-228600" algn="l" defTabSz="914400" rtl="0" eaLnBrk="1" latinLnBrk="0" hangingPunct="1">
-              <a:lnSpc>
-                <a:spcPct val="90000"/>
-              </a:lnSpc>
-              <a:spcBef>
-                <a:spcPts val="500"/>
-              </a:spcBef>
-              <a:buFont typeface="Arial" panose="020B0604020202020204" pitchFamily="34" charset="0"/>
-              <a:buChar char="•"/>
-              <a:defRPr sz="2400" kern="1200">
-                <a:solidFill>
-                  <a:schemeClr val="tx1"/>
-                </a:solidFill>
-                <a:latin typeface="+mn-lt"/>
-                <a:ea typeface="+mn-ea"/>
-                <a:cs typeface="+mn-cs"/>
-              </a:defRPr>
-            </a:lvl2pPr>
-            <a:lvl3pPr marL="1143000" indent="-228600" algn="l" defTabSz="914400" rtl="0" eaLnBrk="1" latinLnBrk="0" hangingPunct="1">
-              <a:lnSpc>
-                <a:spcPct val="90000"/>
-              </a:lnSpc>
-              <a:spcBef>
-                <a:spcPts val="500"/>
-              </a:spcBef>
-              <a:buFont typeface="Arial" panose="020B0604020202020204" pitchFamily="34" charset="0"/>
-              <a:buChar char="•"/>
-              <a:defRPr sz="2000" kern="1200">
-                <a:solidFill>
-                  <a:schemeClr val="tx1"/>
-                </a:solidFill>
-                <a:latin typeface="+mn-lt"/>
-                <a:ea typeface="+mn-ea"/>
-                <a:cs typeface="+mn-cs"/>
-              </a:defRPr>
-            </a:lvl3pPr>
-            <a:lvl4pPr marL="1600200" indent="-228600" algn="l" defTabSz="914400" rtl="0" eaLnBrk="1" latinLnBrk="0" hangingPunct="1">
-              <a:lnSpc>
-                <a:spcPct val="90000"/>
-              </a:lnSpc>
-              <a:spcBef>
-                <a:spcPts val="500"/>
-              </a:spcBef>
-              <a:buFont typeface="Arial" panose="020B0604020202020204" pitchFamily="34" charset="0"/>
-              <a:buChar char="•"/>
-              <a:defRPr sz="1800" kern="1200">
-                <a:solidFill>
-                  <a:schemeClr val="tx1"/>
-                </a:solidFill>
-                <a:latin typeface="+mn-lt"/>
-                <a:ea typeface="+mn-ea"/>
-                <a:cs typeface="+mn-cs"/>
-              </a:defRPr>
-            </a:lvl4pPr>
-            <a:lvl5pPr marL="2057400" indent="-228600" algn="l" defTabSz="914400" rtl="0" eaLnBrk="1" latinLnBrk="0" hangingPunct="1">
-              <a:lnSpc>
-                <a:spcPct val="90000"/>
-              </a:lnSpc>
-              <a:spcBef>
-                <a:spcPts val="500"/>
-              </a:spcBef>
-              <a:buFont typeface="Arial" panose="020B0604020202020204" pitchFamily="34" charset="0"/>
-              <a:buChar char="•"/>
-              <a:defRPr sz="1800" kern="1200">
-                <a:solidFill>
-                  <a:schemeClr val="tx1"/>
-                </a:solidFill>
-                <a:latin typeface="+mn-lt"/>
-                <a:ea typeface="+mn-ea"/>
-                <a:cs typeface="+mn-cs"/>
-              </a:defRPr>
-            </a:lvl5pPr>
-            <a:lvl6pPr marL="2514600" indent="-228600" algn="l" defTabSz="914400" rtl="0" eaLnBrk="1" latinLnBrk="0" hangingPunct="1">
-              <a:lnSpc>
-                <a:spcPct val="90000"/>
-              </a:lnSpc>
-              <a:spcBef>
-                <a:spcPts val="500"/>
-              </a:spcBef>
-              <a:buFont typeface="Arial" panose="020B0604020202020204" pitchFamily="34" charset="0"/>
-              <a:buChar char="•"/>
-              <a:defRPr sz="1800" kern="1200">
-                <a:solidFill>
-                  <a:schemeClr val="tx1"/>
-                </a:solidFill>
-                <a:latin typeface="+mn-lt"/>
-                <a:ea typeface="+mn-ea"/>
-                <a:cs typeface="+mn-cs"/>
-              </a:defRPr>
-            </a:lvl6pPr>
-            <a:lvl7pPr marL="2971800" indent="-228600" algn="l" defTabSz="914400" rtl="0" eaLnBrk="1" latinLnBrk="0" hangingPunct="1">
-              <a:lnSpc>
-                <a:spcPct val="90000"/>
-              </a:lnSpc>
-              <a:spcBef>
-                <a:spcPts val="500"/>
-              </a:spcBef>
-              <a:buFont typeface="Arial" panose="020B0604020202020204" pitchFamily="34" charset="0"/>
-              <a:buChar char="•"/>
-              <a:defRPr sz="1800" kern="1200">
-                <a:solidFill>
-                  <a:schemeClr val="tx1"/>
-                </a:solidFill>
-                <a:latin typeface="+mn-lt"/>
-                <a:ea typeface="+mn-ea"/>
-                <a:cs typeface="+mn-cs"/>
-              </a:defRPr>
-            </a:lvl7pPr>
-            <a:lvl8pPr marL="3429000" indent="-228600" algn="l" defTabSz="914400" rtl="0" eaLnBrk="1" latinLnBrk="0" hangingPunct="1">
-              <a:lnSpc>
-                <a:spcPct val="90000"/>
-              </a:lnSpc>
-              <a:spcBef>
-                <a:spcPts val="500"/>
-              </a:spcBef>
-              <a:buFont typeface="Arial" panose="020B0604020202020204" pitchFamily="34" charset="0"/>
-              <a:buChar char="•"/>
-              <a:defRPr sz="1800" kern="1200">
-                <a:solidFill>
-                  <a:schemeClr val="tx1"/>
-                </a:solidFill>
-                <a:latin typeface="+mn-lt"/>
-                <a:ea typeface="+mn-ea"/>
-                <a:cs typeface="+mn-cs"/>
-              </a:defRPr>
-            </a:lvl8pPr>
-            <a:lvl9pPr marL="3886200" indent="-228600" algn="l" defTabSz="914400" rtl="0" eaLnBrk="1" latinLnBrk="0" hangingPunct="1">
-              <a:lnSpc>
-                <a:spcPct val="90000"/>
-              </a:lnSpc>
-              <a:spcBef>
-                <a:spcPts val="500"/>
-              </a:spcBef>
-              <a:buFont typeface="Arial" panose="020B0604020202020204" pitchFamily="34" charset="0"/>
-              <a:buChar char="•"/>
-              <a:defRPr sz="1800" kern="1200">
-                <a:solidFill>
-                  <a:schemeClr val="tx1"/>
-                </a:solidFill>
-                <a:latin typeface="+mn-lt"/>
-                <a:ea typeface="+mn-ea"/>
-                <a:cs typeface="+mn-cs"/>
-              </a:defRPr>
-            </a:lvl9pPr>
-          </a:lstStyle>
-          <a:p>
-            <a:r>
-              <a:rPr lang="fr-FR" sz="2100" b="1" dirty="0">
-                <a:solidFill>
-                  <a:srgbClr val="111111"/>
-                </a:solidFill>
-                <a:latin typeface="Arial" panose="020B0604020202020204" pitchFamily="34" charset="0"/>
-              </a:rPr>
-              <a:t>Constituer et donner accès à de très grands jeux de données de qualité</a:t>
-            </a:r>
-          </a:p>
-          <a:p>
-            <a:pPr lvl="1"/>
-            <a:r>
-              <a:rPr lang="fr-FR" sz="1800" dirty="0"/>
-              <a:t>le principal facteur limitant à l’heure actuelle n’est pas la technologie mais l’accès à des données de qualité.</a:t>
-            </a:r>
-          </a:p>
-          <a:p>
-            <a:pPr lvl="1"/>
-            <a:r>
-              <a:rPr lang="fr-FR" sz="1800" dirty="0"/>
-              <a:t>L’accès à des données massives, corrélées, complètes, qualifiées, historisées, est une clé technologique majeure de mise au point de technologies d’intelligence artificielle aujourd’hui</a:t>
-            </a:r>
-          </a:p>
-        </p:txBody>
-      </p:sp>
-    </p:spTree>
-    <p:extLst>
-      <p:ext uri="{BB962C8B-B14F-4D97-AF65-F5344CB8AC3E}">
-        <p14:creationId xmlns:p14="http://schemas.microsoft.com/office/powerpoint/2010/main" val="3326188260"/>
-      </p:ext>
-    </p:extLst>
-  </p:cSld>
-  <p:clrMapOvr>
-    <a:masterClrMapping/>
-  </p:clrMapOvr>
-</p:sld>
-</file>
-
-<file path=ppt/slides/slide18.xml><?xml version="1.0" encoding="utf-8"?>
-<p:sld xmlns:a="http://schemas.openxmlformats.org/drawingml/2006/main" xmlns:r="http://schemas.openxmlformats.org/officeDocument/2006/relationships" xmlns:p="http://schemas.openxmlformats.org/presentationml/2006/main">
-  <p:cSld>
-    <p:spTree>
-      <p:nvGrpSpPr>
-        <p:cNvPr id="1" name=""/>
-        <p:cNvGrpSpPr/>
-        <p:nvPr/>
-      </p:nvGrpSpPr>
-      <p:grpSpPr>
-        <a:xfrm>
-          <a:off x="0" y="0"/>
-          <a:ext cx="0" cy="0"/>
-          <a:chOff x="0" y="0"/>
-          <a:chExt cx="0" cy="0"/>
-        </a:xfrm>
-      </p:grpSpPr>
-      <p:sp>
-        <p:nvSpPr>
-          <p:cNvPr id="2" name="Titre 1"/>
-          <p:cNvSpPr>
-            <a:spLocks noGrp="1"/>
-          </p:cNvSpPr>
-          <p:nvPr>
-            <p:ph type="title"/>
-          </p:nvPr>
-        </p:nvSpPr>
-        <p:spPr/>
-        <p:txBody>
-          <a:bodyPr/>
-          <a:lstStyle/>
-          <a:p>
-            <a:r>
-              <a:rPr lang="fr-FR" dirty="0"/>
-              <a:t>Les nouvelles sources de données</a:t>
-            </a:r>
-          </a:p>
-        </p:txBody>
-      </p:sp>
-      <p:sp>
-        <p:nvSpPr>
-          <p:cNvPr id="3" name="Espace réservé du contenu 2"/>
-          <p:cNvSpPr>
-            <a:spLocks noGrp="1"/>
-          </p:cNvSpPr>
-          <p:nvPr>
-            <p:ph idx="1"/>
-          </p:nvPr>
-        </p:nvSpPr>
-        <p:spPr/>
-        <p:txBody>
-          <a:bodyPr/>
-          <a:lstStyle/>
-          <a:p>
-            <a:endParaRPr lang="fr-FR" dirty="0"/>
-          </a:p>
-        </p:txBody>
-      </p:sp>
-      <p:pic>
-        <p:nvPicPr>
-          <p:cNvPr id="1026" name="Picture 2" descr="Nouvelles sources de données Big Data"/>
-          <p:cNvPicPr>
-            <a:picLocks noChangeAspect="1" noChangeArrowheads="1"/>
-          </p:cNvPicPr>
-          <p:nvPr/>
-        </p:nvPicPr>
-        <p:blipFill>
-          <a:blip r:embed="rId2">
-            <a:extLst>
-              <a:ext uri="{28A0092B-C50C-407E-A947-70E740481C1C}">
-                <a14:useLocalDpi xmlns:a14="http://schemas.microsoft.com/office/drawing/2010/main" val="0"/>
-              </a:ext>
-            </a:extLst>
-          </a:blip>
-          <a:srcRect/>
-          <a:stretch>
-            <a:fillRect/>
-          </a:stretch>
-        </p:blipFill>
-        <p:spPr bwMode="auto">
-          <a:xfrm>
-            <a:off x="1709682" y="2186862"/>
-            <a:ext cx="5837663" cy="3269091"/>
-          </a:xfrm>
-          <a:prstGeom prst="rect">
-            <a:avLst/>
-          </a:prstGeom>
-          <a:noFill/>
-          <a:extLst>
-            <a:ext uri="{909E8E84-426E-40DD-AFC4-6F175D3DCCD1}">
-              <a14:hiddenFill xmlns:a14="http://schemas.microsoft.com/office/drawing/2010/main">
-                <a:solidFill>
-                  <a:srgbClr val="FFFFFF"/>
-                </a:solidFill>
-              </a14:hiddenFill>
-            </a:ext>
-          </a:extLst>
-        </p:spPr>
-      </p:pic>
-    </p:spTree>
-    <p:extLst>
-      <p:ext uri="{BB962C8B-B14F-4D97-AF65-F5344CB8AC3E}">
-        <p14:creationId xmlns:p14="http://schemas.microsoft.com/office/powerpoint/2010/main" val="419766916"/>
-      </p:ext>
-    </p:extLst>
-  </p:cSld>
-  <p:clrMapOvr>
-    <a:masterClrMapping/>
-  </p:clrMapOvr>
-</p:sld>
-</file>
-
-<file path=ppt/slides/slide19.xml><?xml version="1.0" encoding="utf-8"?>
-<p:sld xmlns:a="http://schemas.openxmlformats.org/drawingml/2006/main" xmlns:r="http://schemas.openxmlformats.org/officeDocument/2006/relationships" xmlns:p="http://schemas.openxmlformats.org/presentationml/2006/main">
-  <p:cSld>
-    <p:spTree>
-      <p:nvGrpSpPr>
-        <p:cNvPr id="1" name=""/>
-        <p:cNvGrpSpPr/>
-        <p:nvPr/>
-      </p:nvGrpSpPr>
-      <p:grpSpPr>
-        <a:xfrm>
-          <a:off x="0" y="0"/>
-          <a:ext cx="0" cy="0"/>
-          <a:chOff x="0" y="0"/>
-          <a:chExt cx="0" cy="0"/>
-        </a:xfrm>
-      </p:grpSpPr>
-      <p:sp>
-        <p:nvSpPr>
-          <p:cNvPr id="2" name="Titre 1">
-            <a:extLst>
-              <a:ext uri="{FF2B5EF4-FFF2-40B4-BE49-F238E27FC236}">
-                <a16:creationId xmlns:a16="http://schemas.microsoft.com/office/drawing/2014/main" id="{553CA38B-3BB0-4629-BF22-7D4D4C6D2943}"/>
-              </a:ext>
-            </a:extLst>
-          </p:cNvPr>
-          <p:cNvSpPr>
-            <a:spLocks noGrp="1"/>
-          </p:cNvSpPr>
-          <p:nvPr>
-            <p:ph type="title"/>
-          </p:nvPr>
-        </p:nvSpPr>
-        <p:spPr/>
-        <p:txBody>
-          <a:bodyPr/>
-          <a:lstStyle/>
-          <a:p>
-            <a:r>
-              <a:rPr lang="fr-FR" dirty="0"/>
-              <a:t>Les enjeux 2/3</a:t>
-            </a:r>
-          </a:p>
-        </p:txBody>
-      </p:sp>
-      <p:sp>
-        <p:nvSpPr>
-          <p:cNvPr id="7" name="Espace réservé du contenu 2">
-            <a:extLst>
-              <a:ext uri="{FF2B5EF4-FFF2-40B4-BE49-F238E27FC236}">
-                <a16:creationId xmlns:a16="http://schemas.microsoft.com/office/drawing/2014/main" id="{62CAC85E-A812-47F9-A7C5-91F75568AA15}"/>
-              </a:ext>
-            </a:extLst>
-          </p:cNvPr>
-          <p:cNvSpPr txBox="1">
-            <a:spLocks/>
-          </p:cNvSpPr>
-          <p:nvPr/>
-        </p:nvSpPr>
-        <p:spPr>
-          <a:xfrm>
-            <a:off x="628650" y="2226469"/>
-            <a:ext cx="7886700" cy="3263504"/>
-          </a:xfrm>
-          <a:prstGeom prst="rect">
-            <a:avLst/>
-          </a:prstGeom>
-        </p:spPr>
-        <p:txBody>
-          <a:bodyPr/>
-          <a:lstStyle>
-            <a:lvl1pPr marL="228600" indent="-228600" algn="l" defTabSz="914400" rtl="0" eaLnBrk="1" latinLnBrk="0" hangingPunct="1">
-              <a:lnSpc>
-                <a:spcPct val="90000"/>
-              </a:lnSpc>
-              <a:spcBef>
-                <a:spcPts val="1000"/>
-              </a:spcBef>
-              <a:buFont typeface="Arial" panose="020B0604020202020204" pitchFamily="34" charset="0"/>
-              <a:buChar char="•"/>
-              <a:defRPr sz="2800" kern="1200">
-                <a:solidFill>
-                  <a:schemeClr val="tx1"/>
-                </a:solidFill>
-                <a:latin typeface="+mn-lt"/>
-                <a:ea typeface="+mn-ea"/>
-                <a:cs typeface="+mn-cs"/>
-              </a:defRPr>
-            </a:lvl1pPr>
-            <a:lvl2pPr marL="685800" indent="-228600" algn="l" defTabSz="914400" rtl="0" eaLnBrk="1" latinLnBrk="0" hangingPunct="1">
-              <a:lnSpc>
-                <a:spcPct val="90000"/>
-              </a:lnSpc>
-              <a:spcBef>
-                <a:spcPts val="500"/>
-              </a:spcBef>
-              <a:buFont typeface="Arial" panose="020B0604020202020204" pitchFamily="34" charset="0"/>
-              <a:buChar char="•"/>
-              <a:defRPr sz="2400" kern="1200">
-                <a:solidFill>
-                  <a:schemeClr val="tx1"/>
-                </a:solidFill>
-                <a:latin typeface="+mn-lt"/>
-                <a:ea typeface="+mn-ea"/>
-                <a:cs typeface="+mn-cs"/>
-              </a:defRPr>
-            </a:lvl2pPr>
-            <a:lvl3pPr marL="1143000" indent="-228600" algn="l" defTabSz="914400" rtl="0" eaLnBrk="1" latinLnBrk="0" hangingPunct="1">
-              <a:lnSpc>
-                <a:spcPct val="90000"/>
-              </a:lnSpc>
-              <a:spcBef>
-                <a:spcPts val="500"/>
-              </a:spcBef>
-              <a:buFont typeface="Arial" panose="020B0604020202020204" pitchFamily="34" charset="0"/>
-              <a:buChar char="•"/>
-              <a:defRPr sz="2000" kern="1200">
-                <a:solidFill>
-                  <a:schemeClr val="tx1"/>
-                </a:solidFill>
-                <a:latin typeface="+mn-lt"/>
-                <a:ea typeface="+mn-ea"/>
-                <a:cs typeface="+mn-cs"/>
-              </a:defRPr>
-            </a:lvl3pPr>
-            <a:lvl4pPr marL="1600200" indent="-228600" algn="l" defTabSz="914400" rtl="0" eaLnBrk="1" latinLnBrk="0" hangingPunct="1">
-              <a:lnSpc>
-                <a:spcPct val="90000"/>
-              </a:lnSpc>
-              <a:spcBef>
-                <a:spcPts val="500"/>
-              </a:spcBef>
-              <a:buFont typeface="Arial" panose="020B0604020202020204" pitchFamily="34" charset="0"/>
-              <a:buChar char="•"/>
-              <a:defRPr sz="1800" kern="1200">
-                <a:solidFill>
-                  <a:schemeClr val="tx1"/>
-                </a:solidFill>
-                <a:latin typeface="+mn-lt"/>
-                <a:ea typeface="+mn-ea"/>
-                <a:cs typeface="+mn-cs"/>
-              </a:defRPr>
-            </a:lvl4pPr>
-            <a:lvl5pPr marL="2057400" indent="-228600" algn="l" defTabSz="914400" rtl="0" eaLnBrk="1" latinLnBrk="0" hangingPunct="1">
-              <a:lnSpc>
-                <a:spcPct val="90000"/>
-              </a:lnSpc>
-              <a:spcBef>
-                <a:spcPts val="500"/>
-              </a:spcBef>
-              <a:buFont typeface="Arial" panose="020B0604020202020204" pitchFamily="34" charset="0"/>
-              <a:buChar char="•"/>
-              <a:defRPr sz="1800" kern="1200">
-                <a:solidFill>
-                  <a:schemeClr val="tx1"/>
-                </a:solidFill>
-                <a:latin typeface="+mn-lt"/>
-                <a:ea typeface="+mn-ea"/>
-                <a:cs typeface="+mn-cs"/>
-              </a:defRPr>
-            </a:lvl5pPr>
-            <a:lvl6pPr marL="2514600" indent="-228600" algn="l" defTabSz="914400" rtl="0" eaLnBrk="1" latinLnBrk="0" hangingPunct="1">
-              <a:lnSpc>
-                <a:spcPct val="90000"/>
-              </a:lnSpc>
-              <a:spcBef>
-                <a:spcPts val="500"/>
-              </a:spcBef>
-              <a:buFont typeface="Arial" panose="020B0604020202020204" pitchFamily="34" charset="0"/>
-              <a:buChar char="•"/>
-              <a:defRPr sz="1800" kern="1200">
-                <a:solidFill>
-                  <a:schemeClr val="tx1"/>
-                </a:solidFill>
-                <a:latin typeface="+mn-lt"/>
-                <a:ea typeface="+mn-ea"/>
-                <a:cs typeface="+mn-cs"/>
-              </a:defRPr>
-            </a:lvl6pPr>
-            <a:lvl7pPr marL="2971800" indent="-228600" algn="l" defTabSz="914400" rtl="0" eaLnBrk="1" latinLnBrk="0" hangingPunct="1">
-              <a:lnSpc>
-                <a:spcPct val="90000"/>
-              </a:lnSpc>
-              <a:spcBef>
-                <a:spcPts val="500"/>
-              </a:spcBef>
-              <a:buFont typeface="Arial" panose="020B0604020202020204" pitchFamily="34" charset="0"/>
-              <a:buChar char="•"/>
-              <a:defRPr sz="1800" kern="1200">
-                <a:solidFill>
-                  <a:schemeClr val="tx1"/>
-                </a:solidFill>
-                <a:latin typeface="+mn-lt"/>
-                <a:ea typeface="+mn-ea"/>
-                <a:cs typeface="+mn-cs"/>
-              </a:defRPr>
-            </a:lvl7pPr>
-            <a:lvl8pPr marL="3429000" indent="-228600" algn="l" defTabSz="914400" rtl="0" eaLnBrk="1" latinLnBrk="0" hangingPunct="1">
-              <a:lnSpc>
-                <a:spcPct val="90000"/>
-              </a:lnSpc>
-              <a:spcBef>
-                <a:spcPts val="500"/>
-              </a:spcBef>
-              <a:buFont typeface="Arial" panose="020B0604020202020204" pitchFamily="34" charset="0"/>
-              <a:buChar char="•"/>
-              <a:defRPr sz="1800" kern="1200">
-                <a:solidFill>
-                  <a:schemeClr val="tx1"/>
-                </a:solidFill>
-                <a:latin typeface="+mn-lt"/>
-                <a:ea typeface="+mn-ea"/>
-                <a:cs typeface="+mn-cs"/>
-              </a:defRPr>
-            </a:lvl8pPr>
-            <a:lvl9pPr marL="3886200" indent="-228600" algn="l" defTabSz="914400" rtl="0" eaLnBrk="1" latinLnBrk="0" hangingPunct="1">
-              <a:lnSpc>
-                <a:spcPct val="90000"/>
-              </a:lnSpc>
-              <a:spcBef>
-                <a:spcPts val="500"/>
-              </a:spcBef>
-              <a:buFont typeface="Arial" panose="020B0604020202020204" pitchFamily="34" charset="0"/>
-              <a:buChar char="•"/>
-              <a:defRPr sz="1800" kern="1200">
-                <a:solidFill>
-                  <a:schemeClr val="tx1"/>
-                </a:solidFill>
-                <a:latin typeface="+mn-lt"/>
-                <a:ea typeface="+mn-ea"/>
-                <a:cs typeface="+mn-cs"/>
-              </a:defRPr>
-            </a:lvl9pPr>
-          </a:lstStyle>
-          <a:p>
-            <a:r>
-              <a:rPr lang="fr-FR" sz="2100" b="1" dirty="0">
-                <a:solidFill>
-                  <a:srgbClr val="111111"/>
-                </a:solidFill>
-                <a:latin typeface="Arial" panose="020B0604020202020204" pitchFamily="34" charset="0"/>
-              </a:rPr>
-              <a:t>Embaucher, capitaliser et former</a:t>
-            </a:r>
-          </a:p>
-          <a:p>
-            <a:r>
-              <a:rPr lang="fr-FR" sz="2100" dirty="0">
-                <a:solidFill>
-                  <a:srgbClr val="111111"/>
-                </a:solidFill>
-                <a:latin typeface="Arial" panose="020B0604020202020204" pitchFamily="34" charset="0"/>
-              </a:rPr>
-              <a:t>Créer des équipes autonomes</a:t>
-            </a:r>
-          </a:p>
-          <a:p>
-            <a:r>
-              <a:rPr lang="en-US" sz="2100" dirty="0"/>
-              <a:t>Data Scientist (n.): Person who is better at statistics than any software engineer and better at software engineering than any statistician</a:t>
-            </a:r>
-            <a:endParaRPr lang="fr-FR" sz="2100" dirty="0"/>
-          </a:p>
-          <a:p>
-            <a:endParaRPr lang="fr-FR" sz="2100" b="1" dirty="0">
-              <a:solidFill>
-                <a:srgbClr val="111111"/>
-              </a:solidFill>
-              <a:latin typeface="Arial" panose="020B0604020202020204" pitchFamily="34" charset="0"/>
-            </a:endParaRPr>
-          </a:p>
-        </p:txBody>
-      </p:sp>
-      <p:pic>
-        <p:nvPicPr>
-          <p:cNvPr id="4" name="Picture 2" descr="https://upload.wikimedia.org/wikipedia/commons/4/44/DataScienceDisciplines.png">
-            <a:extLst>
-              <a:ext uri="{FF2B5EF4-FFF2-40B4-BE49-F238E27FC236}">
-                <a16:creationId xmlns:a16="http://schemas.microsoft.com/office/drawing/2014/main" id="{55A7E1B0-1946-4E1F-92C7-9D63F94A7C70}"/>
-              </a:ext>
-            </a:extLst>
-          </p:cNvPr>
-          <p:cNvPicPr>
-            <a:picLocks noChangeAspect="1" noChangeArrowheads="1"/>
-          </p:cNvPicPr>
-          <p:nvPr/>
-        </p:nvPicPr>
-        <p:blipFill>
-          <a:blip r:embed="rId2">
-            <a:extLst>
-              <a:ext uri="{28A0092B-C50C-407E-A947-70E740481C1C}">
-                <a14:useLocalDpi xmlns:a14="http://schemas.microsoft.com/office/drawing/2010/main" val="0"/>
-              </a:ext>
-            </a:extLst>
-          </a:blip>
-          <a:srcRect/>
-          <a:stretch>
-            <a:fillRect/>
-          </a:stretch>
-        </p:blipFill>
-        <p:spPr bwMode="auto">
-          <a:xfrm>
-            <a:off x="3034753" y="3667033"/>
-            <a:ext cx="3184055" cy="2388041"/>
-          </a:xfrm>
-          <a:prstGeom prst="rect">
-            <a:avLst/>
-          </a:prstGeom>
-          <a:noFill/>
-          <a:extLst>
-            <a:ext uri="{909E8E84-426E-40DD-AFC4-6F175D3DCCD1}">
-              <a14:hiddenFill xmlns:a14="http://schemas.microsoft.com/office/drawing/2010/main">
-                <a:solidFill>
-                  <a:srgbClr val="FFFFFF"/>
-                </a:solidFill>
-              </a14:hiddenFill>
-            </a:ext>
-          </a:extLst>
-        </p:spPr>
-      </p:pic>
-    </p:spTree>
-    <p:extLst>
-      <p:ext uri="{BB962C8B-B14F-4D97-AF65-F5344CB8AC3E}">
-        <p14:creationId xmlns:p14="http://schemas.microsoft.com/office/powerpoint/2010/main" val="3120774273"/>
-      </p:ext>
-    </p:extLst>
-  </p:cSld>
-  <p:clrMapOvr>
-    <a:masterClrMapping/>
-  </p:clrMapOvr>
-</p:sld>
-</file>
-
 <file path=ppt/slides/slide2.xml><?xml version="1.0" encoding="utf-8"?>
 <p:sld xmlns:a="http://schemas.openxmlformats.org/drawingml/2006/main" xmlns:r="http://schemas.openxmlformats.org/officeDocument/2006/relationships" xmlns:p="http://schemas.openxmlformats.org/presentationml/2006/main">
   <p:cSld>
@@ -9570,655 +8844,6 @@
     <p:extLst>
       <p:ext uri="{BB962C8B-B14F-4D97-AF65-F5344CB8AC3E}">
         <p14:creationId xmlns:p14="http://schemas.microsoft.com/office/powerpoint/2010/main" val="4180467311"/>
-      </p:ext>
-    </p:extLst>
-  </p:cSld>
-  <p:clrMapOvr>
-    <a:masterClrMapping/>
-  </p:clrMapOvr>
-</p:sld>
-</file>
-
-<file path=ppt/slides/slide20.xml><?xml version="1.0" encoding="utf-8"?>
-<p:sld xmlns:a="http://schemas.openxmlformats.org/drawingml/2006/main" xmlns:r="http://schemas.openxmlformats.org/officeDocument/2006/relationships" xmlns:p="http://schemas.openxmlformats.org/presentationml/2006/main">
-  <p:cSld>
-    <p:spTree>
-      <p:nvGrpSpPr>
-        <p:cNvPr id="1" name=""/>
-        <p:cNvGrpSpPr/>
-        <p:nvPr/>
-      </p:nvGrpSpPr>
-      <p:grpSpPr>
-        <a:xfrm>
-          <a:off x="0" y="0"/>
-          <a:ext cx="0" cy="0"/>
-          <a:chOff x="0" y="0"/>
-          <a:chExt cx="0" cy="0"/>
-        </a:xfrm>
-      </p:grpSpPr>
-      <p:sp>
-        <p:nvSpPr>
-          <p:cNvPr id="2" name="Titre 1">
-            <a:extLst>
-              <a:ext uri="{FF2B5EF4-FFF2-40B4-BE49-F238E27FC236}">
-                <a16:creationId xmlns:a16="http://schemas.microsoft.com/office/drawing/2014/main" id="{553CA38B-3BB0-4629-BF22-7D4D4C6D2943}"/>
-              </a:ext>
-            </a:extLst>
-          </p:cNvPr>
-          <p:cNvSpPr>
-            <a:spLocks noGrp="1"/>
-          </p:cNvSpPr>
-          <p:nvPr>
-            <p:ph type="title"/>
-          </p:nvPr>
-        </p:nvSpPr>
-        <p:spPr/>
-        <p:txBody>
-          <a:bodyPr/>
-          <a:lstStyle/>
-          <a:p>
-            <a:r>
-              <a:rPr lang="fr-FR" dirty="0"/>
-              <a:t>Les enjeux 3/3</a:t>
-            </a:r>
-          </a:p>
-        </p:txBody>
-      </p:sp>
-      <p:sp>
-        <p:nvSpPr>
-          <p:cNvPr id="7" name="Espace réservé du contenu 2">
-            <a:extLst>
-              <a:ext uri="{FF2B5EF4-FFF2-40B4-BE49-F238E27FC236}">
-                <a16:creationId xmlns:a16="http://schemas.microsoft.com/office/drawing/2014/main" id="{62CAC85E-A812-47F9-A7C5-91F75568AA15}"/>
-              </a:ext>
-            </a:extLst>
-          </p:cNvPr>
-          <p:cNvSpPr txBox="1">
-            <a:spLocks/>
-          </p:cNvSpPr>
-          <p:nvPr/>
-        </p:nvSpPr>
-        <p:spPr>
-          <a:xfrm>
-            <a:off x="628650" y="2226469"/>
-            <a:ext cx="7886700" cy="3263504"/>
-          </a:xfrm>
-          <a:prstGeom prst="rect">
-            <a:avLst/>
-          </a:prstGeom>
-        </p:spPr>
-        <p:txBody>
-          <a:bodyPr/>
-          <a:lstStyle>
-            <a:lvl1pPr marL="228600" indent="-228600" algn="l" defTabSz="914400" rtl="0" eaLnBrk="1" latinLnBrk="0" hangingPunct="1">
-              <a:lnSpc>
-                <a:spcPct val="90000"/>
-              </a:lnSpc>
-              <a:spcBef>
-                <a:spcPts val="1000"/>
-              </a:spcBef>
-              <a:buFont typeface="Arial" panose="020B0604020202020204" pitchFamily="34" charset="0"/>
-              <a:buChar char="•"/>
-              <a:defRPr sz="2800" kern="1200">
-                <a:solidFill>
-                  <a:schemeClr val="tx1"/>
-                </a:solidFill>
-                <a:latin typeface="+mn-lt"/>
-                <a:ea typeface="+mn-ea"/>
-                <a:cs typeface="+mn-cs"/>
-              </a:defRPr>
-            </a:lvl1pPr>
-            <a:lvl2pPr marL="685800" indent="-228600" algn="l" defTabSz="914400" rtl="0" eaLnBrk="1" latinLnBrk="0" hangingPunct="1">
-              <a:lnSpc>
-                <a:spcPct val="90000"/>
-              </a:lnSpc>
-              <a:spcBef>
-                <a:spcPts val="500"/>
-              </a:spcBef>
-              <a:buFont typeface="Arial" panose="020B0604020202020204" pitchFamily="34" charset="0"/>
-              <a:buChar char="•"/>
-              <a:defRPr sz="2400" kern="1200">
-                <a:solidFill>
-                  <a:schemeClr val="tx1"/>
-                </a:solidFill>
-                <a:latin typeface="+mn-lt"/>
-                <a:ea typeface="+mn-ea"/>
-                <a:cs typeface="+mn-cs"/>
-              </a:defRPr>
-            </a:lvl2pPr>
-            <a:lvl3pPr marL="1143000" indent="-228600" algn="l" defTabSz="914400" rtl="0" eaLnBrk="1" latinLnBrk="0" hangingPunct="1">
-              <a:lnSpc>
-                <a:spcPct val="90000"/>
-              </a:lnSpc>
-              <a:spcBef>
-                <a:spcPts val="500"/>
-              </a:spcBef>
-              <a:buFont typeface="Arial" panose="020B0604020202020204" pitchFamily="34" charset="0"/>
-              <a:buChar char="•"/>
-              <a:defRPr sz="2000" kern="1200">
-                <a:solidFill>
-                  <a:schemeClr val="tx1"/>
-                </a:solidFill>
-                <a:latin typeface="+mn-lt"/>
-                <a:ea typeface="+mn-ea"/>
-                <a:cs typeface="+mn-cs"/>
-              </a:defRPr>
-            </a:lvl3pPr>
-            <a:lvl4pPr marL="1600200" indent="-228600" algn="l" defTabSz="914400" rtl="0" eaLnBrk="1" latinLnBrk="0" hangingPunct="1">
-              <a:lnSpc>
-                <a:spcPct val="90000"/>
-              </a:lnSpc>
-              <a:spcBef>
-                <a:spcPts val="500"/>
-              </a:spcBef>
-              <a:buFont typeface="Arial" panose="020B0604020202020204" pitchFamily="34" charset="0"/>
-              <a:buChar char="•"/>
-              <a:defRPr sz="1800" kern="1200">
-                <a:solidFill>
-                  <a:schemeClr val="tx1"/>
-                </a:solidFill>
-                <a:latin typeface="+mn-lt"/>
-                <a:ea typeface="+mn-ea"/>
-                <a:cs typeface="+mn-cs"/>
-              </a:defRPr>
-            </a:lvl4pPr>
-            <a:lvl5pPr marL="2057400" indent="-228600" algn="l" defTabSz="914400" rtl="0" eaLnBrk="1" latinLnBrk="0" hangingPunct="1">
-              <a:lnSpc>
-                <a:spcPct val="90000"/>
-              </a:lnSpc>
-              <a:spcBef>
-                <a:spcPts val="500"/>
-              </a:spcBef>
-              <a:buFont typeface="Arial" panose="020B0604020202020204" pitchFamily="34" charset="0"/>
-              <a:buChar char="•"/>
-              <a:defRPr sz="1800" kern="1200">
-                <a:solidFill>
-                  <a:schemeClr val="tx1"/>
-                </a:solidFill>
-                <a:latin typeface="+mn-lt"/>
-                <a:ea typeface="+mn-ea"/>
-                <a:cs typeface="+mn-cs"/>
-              </a:defRPr>
-            </a:lvl5pPr>
-            <a:lvl6pPr marL="2514600" indent="-228600" algn="l" defTabSz="914400" rtl="0" eaLnBrk="1" latinLnBrk="0" hangingPunct="1">
-              <a:lnSpc>
-                <a:spcPct val="90000"/>
-              </a:lnSpc>
-              <a:spcBef>
-                <a:spcPts val="500"/>
-              </a:spcBef>
-              <a:buFont typeface="Arial" panose="020B0604020202020204" pitchFamily="34" charset="0"/>
-              <a:buChar char="•"/>
-              <a:defRPr sz="1800" kern="1200">
-                <a:solidFill>
-                  <a:schemeClr val="tx1"/>
-                </a:solidFill>
-                <a:latin typeface="+mn-lt"/>
-                <a:ea typeface="+mn-ea"/>
-                <a:cs typeface="+mn-cs"/>
-              </a:defRPr>
-            </a:lvl6pPr>
-            <a:lvl7pPr marL="2971800" indent="-228600" algn="l" defTabSz="914400" rtl="0" eaLnBrk="1" latinLnBrk="0" hangingPunct="1">
-              <a:lnSpc>
-                <a:spcPct val="90000"/>
-              </a:lnSpc>
-              <a:spcBef>
-                <a:spcPts val="500"/>
-              </a:spcBef>
-              <a:buFont typeface="Arial" panose="020B0604020202020204" pitchFamily="34" charset="0"/>
-              <a:buChar char="•"/>
-              <a:defRPr sz="1800" kern="1200">
-                <a:solidFill>
-                  <a:schemeClr val="tx1"/>
-                </a:solidFill>
-                <a:latin typeface="+mn-lt"/>
-                <a:ea typeface="+mn-ea"/>
-                <a:cs typeface="+mn-cs"/>
-              </a:defRPr>
-            </a:lvl7pPr>
-            <a:lvl8pPr marL="3429000" indent="-228600" algn="l" defTabSz="914400" rtl="0" eaLnBrk="1" latinLnBrk="0" hangingPunct="1">
-              <a:lnSpc>
-                <a:spcPct val="90000"/>
-              </a:lnSpc>
-              <a:spcBef>
-                <a:spcPts val="500"/>
-              </a:spcBef>
-              <a:buFont typeface="Arial" panose="020B0604020202020204" pitchFamily="34" charset="0"/>
-              <a:buChar char="•"/>
-              <a:defRPr sz="1800" kern="1200">
-                <a:solidFill>
-                  <a:schemeClr val="tx1"/>
-                </a:solidFill>
-                <a:latin typeface="+mn-lt"/>
-                <a:ea typeface="+mn-ea"/>
-                <a:cs typeface="+mn-cs"/>
-              </a:defRPr>
-            </a:lvl8pPr>
-            <a:lvl9pPr marL="3886200" indent="-228600" algn="l" defTabSz="914400" rtl="0" eaLnBrk="1" latinLnBrk="0" hangingPunct="1">
-              <a:lnSpc>
-                <a:spcPct val="90000"/>
-              </a:lnSpc>
-              <a:spcBef>
-                <a:spcPts val="500"/>
-              </a:spcBef>
-              <a:buFont typeface="Arial" panose="020B0604020202020204" pitchFamily="34" charset="0"/>
-              <a:buChar char="•"/>
-              <a:defRPr sz="1800" kern="1200">
-                <a:solidFill>
-                  <a:schemeClr val="tx1"/>
-                </a:solidFill>
-                <a:latin typeface="+mn-lt"/>
-                <a:ea typeface="+mn-ea"/>
-                <a:cs typeface="+mn-cs"/>
-              </a:defRPr>
-            </a:lvl9pPr>
-          </a:lstStyle>
-          <a:p>
-            <a:r>
-              <a:rPr lang="fr-FR" sz="2100" b="1" dirty="0">
-                <a:solidFill>
-                  <a:srgbClr val="111111"/>
-                </a:solidFill>
-                <a:latin typeface="Arial" panose="020B0604020202020204" pitchFamily="34" charset="0"/>
-              </a:rPr>
-              <a:t>Mettre en pratique et industrialiser</a:t>
-            </a:r>
-          </a:p>
-        </p:txBody>
-      </p:sp>
-    </p:spTree>
-    <p:extLst>
-      <p:ext uri="{BB962C8B-B14F-4D97-AF65-F5344CB8AC3E}">
-        <p14:creationId xmlns:p14="http://schemas.microsoft.com/office/powerpoint/2010/main" val="2372488552"/>
-      </p:ext>
-    </p:extLst>
-  </p:cSld>
-  <p:clrMapOvr>
-    <a:masterClrMapping/>
-  </p:clrMapOvr>
-</p:sld>
-</file>
-
-<file path=ppt/slides/slide21.xml><?xml version="1.0" encoding="utf-8"?>
-<p:sld xmlns:a="http://schemas.openxmlformats.org/drawingml/2006/main" xmlns:r="http://schemas.openxmlformats.org/officeDocument/2006/relationships" xmlns:p="http://schemas.openxmlformats.org/presentationml/2006/main">
-  <p:cSld>
-    <p:spTree>
-      <p:nvGrpSpPr>
-        <p:cNvPr id="1" name=""/>
-        <p:cNvGrpSpPr/>
-        <p:nvPr/>
-      </p:nvGrpSpPr>
-      <p:grpSpPr>
-        <a:xfrm>
-          <a:off x="0" y="0"/>
-          <a:ext cx="0" cy="0"/>
-          <a:chOff x="0" y="0"/>
-          <a:chExt cx="0" cy="0"/>
-        </a:xfrm>
-      </p:grpSpPr>
-      <p:sp>
-        <p:nvSpPr>
-          <p:cNvPr id="2" name="Titre 1">
-            <a:extLst>
-              <a:ext uri="{FF2B5EF4-FFF2-40B4-BE49-F238E27FC236}">
-                <a16:creationId xmlns:a16="http://schemas.microsoft.com/office/drawing/2014/main" id="{5D53DFA8-ADE3-92F4-F517-C4E45DC3438F}"/>
-              </a:ext>
-            </a:extLst>
-          </p:cNvPr>
-          <p:cNvSpPr>
-            <a:spLocks noGrp="1"/>
-          </p:cNvSpPr>
-          <p:nvPr>
-            <p:ph type="title"/>
-          </p:nvPr>
-        </p:nvSpPr>
-        <p:spPr/>
-        <p:txBody>
-          <a:bodyPr/>
-          <a:lstStyle/>
-          <a:p>
-            <a:r>
-              <a:rPr lang="fr-FR" dirty="0"/>
-              <a:t>DevOps</a:t>
-            </a:r>
-          </a:p>
-        </p:txBody>
-      </p:sp>
-      <p:sp>
-        <p:nvSpPr>
-          <p:cNvPr id="3" name="Espace réservé du contenu 2">
-            <a:extLst>
-              <a:ext uri="{FF2B5EF4-FFF2-40B4-BE49-F238E27FC236}">
-                <a16:creationId xmlns:a16="http://schemas.microsoft.com/office/drawing/2014/main" id="{AA8790CE-8B57-2F85-5E0B-E9811E97C088}"/>
-              </a:ext>
-            </a:extLst>
-          </p:cNvPr>
-          <p:cNvSpPr>
-            <a:spLocks noGrp="1"/>
-          </p:cNvSpPr>
-          <p:nvPr>
-            <p:ph idx="1"/>
-          </p:nvPr>
-        </p:nvSpPr>
-        <p:spPr/>
-        <p:txBody>
-          <a:bodyPr/>
-          <a:lstStyle/>
-          <a:p>
-            <a:r>
-              <a:rPr lang="fr-FR" dirty="0"/>
-              <a:t>Le DevOps est un mouvement en ingénierie informatique et une pratique technique visant à l'unification du développement logiciel (dev) et de l'administration des infrastructures informatiques (</a:t>
-            </a:r>
-            <a:r>
-              <a:rPr lang="fr-FR" dirty="0" err="1"/>
-              <a:t>ops</a:t>
-            </a:r>
-            <a:r>
-              <a:rPr lang="fr-FR" dirty="0"/>
-              <a:t>), notamment l'administration système</a:t>
-            </a:r>
-          </a:p>
-          <a:p>
-            <a:endParaRPr lang="fr-FR" dirty="0"/>
-          </a:p>
-        </p:txBody>
-      </p:sp>
-    </p:spTree>
-    <p:extLst>
-      <p:ext uri="{BB962C8B-B14F-4D97-AF65-F5344CB8AC3E}">
-        <p14:creationId xmlns:p14="http://schemas.microsoft.com/office/powerpoint/2010/main" val="1383536896"/>
-      </p:ext>
-    </p:extLst>
-  </p:cSld>
-  <p:clrMapOvr>
-    <a:masterClrMapping/>
-  </p:clrMapOvr>
-</p:sld>
-</file>
-
-<file path=ppt/slides/slide22.xml><?xml version="1.0" encoding="utf-8"?>
-<p:sld xmlns:a="http://schemas.openxmlformats.org/drawingml/2006/main" xmlns:r="http://schemas.openxmlformats.org/officeDocument/2006/relationships" xmlns:p="http://schemas.openxmlformats.org/presentationml/2006/main">
-  <p:cSld>
-    <p:spTree>
-      <p:nvGrpSpPr>
-        <p:cNvPr id="1" name=""/>
-        <p:cNvGrpSpPr/>
-        <p:nvPr/>
-      </p:nvGrpSpPr>
-      <p:grpSpPr>
-        <a:xfrm>
-          <a:off x="0" y="0"/>
-          <a:ext cx="0" cy="0"/>
-          <a:chOff x="0" y="0"/>
-          <a:chExt cx="0" cy="0"/>
-        </a:xfrm>
-      </p:grpSpPr>
-      <p:sp>
-        <p:nvSpPr>
-          <p:cNvPr id="2" name="Titre 1">
-            <a:extLst>
-              <a:ext uri="{FF2B5EF4-FFF2-40B4-BE49-F238E27FC236}">
-                <a16:creationId xmlns:a16="http://schemas.microsoft.com/office/drawing/2014/main" id="{3A22D1B0-D225-AF12-B07D-AE796A92E172}"/>
-              </a:ext>
-            </a:extLst>
-          </p:cNvPr>
-          <p:cNvSpPr>
-            <a:spLocks noGrp="1"/>
-          </p:cNvSpPr>
-          <p:nvPr>
-            <p:ph type="title"/>
-          </p:nvPr>
-        </p:nvSpPr>
-        <p:spPr/>
-        <p:txBody>
-          <a:bodyPr/>
-          <a:lstStyle/>
-          <a:p>
-            <a:r>
-              <a:rPr lang="fr-FR" dirty="0"/>
-              <a:t>Le mur de la confusion</a:t>
-            </a:r>
-          </a:p>
-        </p:txBody>
-      </p:sp>
-      <p:sp>
-        <p:nvSpPr>
-          <p:cNvPr id="3" name="Espace réservé du contenu 2">
-            <a:extLst>
-              <a:ext uri="{FF2B5EF4-FFF2-40B4-BE49-F238E27FC236}">
-                <a16:creationId xmlns:a16="http://schemas.microsoft.com/office/drawing/2014/main" id="{3C0E8835-D19A-50E2-8328-A00FF137C319}"/>
-              </a:ext>
-            </a:extLst>
-          </p:cNvPr>
-          <p:cNvSpPr>
-            <a:spLocks noGrp="1"/>
-          </p:cNvSpPr>
-          <p:nvPr>
-            <p:ph idx="1"/>
-          </p:nvPr>
-        </p:nvSpPr>
-        <p:spPr/>
-        <p:txBody>
-          <a:bodyPr/>
-          <a:lstStyle/>
-          <a:p>
-            <a:r>
-              <a:rPr lang="fr-FR" dirty="0"/>
-              <a:t>Il faut savoir qu'à cette époque, l'informatique d'entreprise a "siloté" les aspects dev et </a:t>
-            </a:r>
-            <a:r>
-              <a:rPr lang="fr-FR" dirty="0" err="1"/>
-              <a:t>ops</a:t>
-            </a:r>
-            <a:r>
-              <a:rPr lang="fr-FR" dirty="0"/>
-              <a:t> des applications, en plaçant les responsabilités respectives dans des équipes séparées</a:t>
-            </a:r>
-          </a:p>
-          <a:p>
-            <a:r>
-              <a:rPr lang="fr-FR" dirty="0"/>
-              <a:t>Il s'est alors créé ce qu'on appelle le mur de la confusion. Ce mur est apparu car les deux équipes ont des objectifs respectifs antagonistes.</a:t>
-            </a:r>
-          </a:p>
-        </p:txBody>
-      </p:sp>
-      <p:pic>
-        <p:nvPicPr>
-          <p:cNvPr id="1026" name="Picture 2" descr="Le mur de la confusion entre les équipes Dev et Ops">
-            <a:extLst>
-              <a:ext uri="{FF2B5EF4-FFF2-40B4-BE49-F238E27FC236}">
-                <a16:creationId xmlns:a16="http://schemas.microsoft.com/office/drawing/2014/main" id="{7ED0BEE7-5774-D00B-8D13-52A4F967257C}"/>
-              </a:ext>
-            </a:extLst>
-          </p:cNvPr>
-          <p:cNvPicPr>
-            <a:picLocks noChangeAspect="1" noChangeArrowheads="1"/>
-          </p:cNvPicPr>
-          <p:nvPr/>
-        </p:nvPicPr>
-        <p:blipFill>
-          <a:blip r:embed="rId2">
-            <a:extLst>
-              <a:ext uri="{28A0092B-C50C-407E-A947-70E740481C1C}">
-                <a14:useLocalDpi xmlns:a14="http://schemas.microsoft.com/office/drawing/2010/main" val="0"/>
-              </a:ext>
-            </a:extLst>
-          </a:blip>
-          <a:srcRect/>
-          <a:stretch>
-            <a:fillRect/>
-          </a:stretch>
-        </p:blipFill>
-        <p:spPr bwMode="auto">
-          <a:xfrm>
-            <a:off x="2347975" y="4641563"/>
-            <a:ext cx="3160130" cy="1780546"/>
-          </a:xfrm>
-          <a:prstGeom prst="rect">
-            <a:avLst/>
-          </a:prstGeom>
-          <a:noFill/>
-          <a:extLst>
-            <a:ext uri="{909E8E84-426E-40DD-AFC4-6F175D3DCCD1}">
-              <a14:hiddenFill xmlns:a14="http://schemas.microsoft.com/office/drawing/2010/main">
-                <a:solidFill>
-                  <a:srgbClr val="FFFFFF"/>
-                </a:solidFill>
-              </a14:hiddenFill>
-            </a:ext>
-          </a:extLst>
-        </p:spPr>
-      </p:pic>
-    </p:spTree>
-    <p:extLst>
-      <p:ext uri="{BB962C8B-B14F-4D97-AF65-F5344CB8AC3E}">
-        <p14:creationId xmlns:p14="http://schemas.microsoft.com/office/powerpoint/2010/main" val="558847619"/>
-      </p:ext>
-    </p:extLst>
-  </p:cSld>
-  <p:clrMapOvr>
-    <a:masterClrMapping/>
-  </p:clrMapOvr>
-</p:sld>
-</file>
-
-<file path=ppt/slides/slide23.xml><?xml version="1.0" encoding="utf-8"?>
-<p:sld xmlns:a="http://schemas.openxmlformats.org/drawingml/2006/main" xmlns:r="http://schemas.openxmlformats.org/officeDocument/2006/relationships" xmlns:p="http://schemas.openxmlformats.org/presentationml/2006/main">
-  <p:cSld>
-    <p:spTree>
-      <p:nvGrpSpPr>
-        <p:cNvPr id="1" name=""/>
-        <p:cNvGrpSpPr/>
-        <p:nvPr/>
-      </p:nvGrpSpPr>
-      <p:grpSpPr>
-        <a:xfrm>
-          <a:off x="0" y="0"/>
-          <a:ext cx="0" cy="0"/>
-          <a:chOff x="0" y="0"/>
-          <a:chExt cx="0" cy="0"/>
-        </a:xfrm>
-      </p:grpSpPr>
-      <p:sp>
-        <p:nvSpPr>
-          <p:cNvPr id="2" name="Titre 1">
-            <a:extLst>
-              <a:ext uri="{FF2B5EF4-FFF2-40B4-BE49-F238E27FC236}">
-                <a16:creationId xmlns:a16="http://schemas.microsoft.com/office/drawing/2014/main" id="{C6F55D1D-7A7E-23A5-901C-3D720DA057C2}"/>
-              </a:ext>
-            </a:extLst>
-          </p:cNvPr>
-          <p:cNvSpPr>
-            <a:spLocks noGrp="1"/>
-          </p:cNvSpPr>
-          <p:nvPr>
-            <p:ph type="title"/>
-          </p:nvPr>
-        </p:nvSpPr>
-        <p:spPr/>
-        <p:txBody>
-          <a:bodyPr/>
-          <a:lstStyle/>
-          <a:p>
-            <a:r>
-              <a:rPr lang="fr-FR" dirty="0"/>
-              <a:t>CALMS</a:t>
-            </a:r>
-          </a:p>
-        </p:txBody>
-      </p:sp>
-      <p:sp>
-        <p:nvSpPr>
-          <p:cNvPr id="3" name="Espace réservé du contenu 2">
-            <a:extLst>
-              <a:ext uri="{FF2B5EF4-FFF2-40B4-BE49-F238E27FC236}">
-                <a16:creationId xmlns:a16="http://schemas.microsoft.com/office/drawing/2014/main" id="{79930454-E3AE-9B85-7AF8-8EB9CA22C70B}"/>
-              </a:ext>
-            </a:extLst>
-          </p:cNvPr>
-          <p:cNvSpPr>
-            <a:spLocks noGrp="1"/>
-          </p:cNvSpPr>
-          <p:nvPr>
-            <p:ph idx="1"/>
-          </p:nvPr>
-        </p:nvSpPr>
-        <p:spPr/>
-        <p:txBody>
-          <a:bodyPr/>
-          <a:lstStyle/>
-          <a:p>
-            <a:r>
-              <a:rPr lang="fr-FR" dirty="0"/>
-              <a:t>Culture</a:t>
-            </a:r>
-          </a:p>
-          <a:p>
-            <a:pPr lvl="1"/>
-            <a:r>
-              <a:rPr lang="fr-FR" dirty="0"/>
-              <a:t>Culture DevOps</a:t>
-            </a:r>
-          </a:p>
-          <a:p>
-            <a:r>
-              <a:rPr lang="fr-FR" dirty="0"/>
-              <a:t>Automatisation</a:t>
-            </a:r>
-          </a:p>
-          <a:p>
-            <a:pPr lvl="1"/>
-            <a:r>
-              <a:rPr lang="fr-FR" dirty="0"/>
-              <a:t>Pipelines</a:t>
-            </a:r>
-          </a:p>
-          <a:p>
-            <a:r>
-              <a:rPr lang="fr-FR" dirty="0"/>
-              <a:t>Lean</a:t>
-            </a:r>
-          </a:p>
-          <a:p>
-            <a:pPr lvl="1"/>
-            <a:r>
-              <a:rPr lang="fr-FR" dirty="0"/>
-              <a:t>Chaine de valeurs sans gaspillage</a:t>
-            </a:r>
-          </a:p>
-          <a:p>
-            <a:r>
-              <a:rPr lang="fr-FR" dirty="0"/>
-              <a:t>Mesure</a:t>
-            </a:r>
-          </a:p>
-          <a:p>
-            <a:pPr lvl="1"/>
-            <a:r>
-              <a:rPr lang="fr-FR" dirty="0"/>
-              <a:t>Watch, surveillance</a:t>
-            </a:r>
-          </a:p>
-          <a:p>
-            <a:r>
-              <a:rPr lang="fr-FR" dirty="0"/>
-              <a:t>Share</a:t>
-            </a:r>
-          </a:p>
-          <a:p>
-            <a:pPr lvl="1"/>
-            <a:r>
-              <a:rPr lang="fr-FR" dirty="0"/>
-              <a:t>Partage Dev et Ops</a:t>
-            </a:r>
-          </a:p>
-        </p:txBody>
-      </p:sp>
-    </p:spTree>
-    <p:extLst>
-      <p:ext uri="{BB962C8B-B14F-4D97-AF65-F5344CB8AC3E}">
-        <p14:creationId xmlns:p14="http://schemas.microsoft.com/office/powerpoint/2010/main" val="880616843"/>
       </p:ext>
     </p:extLst>
   </p:cSld>
